--- a/pptx canvas/Lecture7.pptx
+++ b/pptx canvas/Lecture7.pptx
@@ -5,7 +5,7 @@
     <p:sldMasterId id="2147483648" r:id="rId1"/>
   </p:sldMasterIdLst>
   <p:notesMasterIdLst>
-    <p:notesMasterId r:id="rId35"/>
+    <p:notesMasterId r:id="rId34"/>
   </p:notesMasterIdLst>
   <p:sldIdLst>
     <p:sldId id="256" r:id="rId2"/>
@@ -33,14 +33,13 @@
     <p:sldId id="352" r:id="rId24"/>
     <p:sldId id="370" r:id="rId25"/>
     <p:sldId id="321" r:id="rId26"/>
-    <p:sldId id="329" r:id="rId27"/>
-    <p:sldId id="353" r:id="rId28"/>
-    <p:sldId id="330" r:id="rId29"/>
-    <p:sldId id="331" r:id="rId30"/>
-    <p:sldId id="334" r:id="rId31"/>
-    <p:sldId id="332" r:id="rId32"/>
-    <p:sldId id="333" r:id="rId33"/>
-    <p:sldId id="366" r:id="rId34"/>
+    <p:sldId id="330" r:id="rId27"/>
+    <p:sldId id="329" r:id="rId28"/>
+    <p:sldId id="331" r:id="rId29"/>
+    <p:sldId id="334" r:id="rId30"/>
+    <p:sldId id="332" r:id="rId31"/>
+    <p:sldId id="333" r:id="rId32"/>
+    <p:sldId id="366" r:id="rId33"/>
   </p:sldIdLst>
   <p:sldSz cx="12192000" cy="6858000"/>
   <p:notesSz cx="6858000" cy="9144000"/>
@@ -8639,6 +8638,235 @@
           <p:cNvPr id="2" name="Title 1">
             <a:extLst>
               <a:ext uri="{FF2B5EF4-FFF2-40B4-BE49-F238E27FC236}">
+                <a16:creationId xmlns:a16="http://schemas.microsoft.com/office/drawing/2014/main" id="{22E57BA0-78E2-3F36-B68F-77FFEAAD4AA5}"/>
+              </a:ext>
+            </a:extLst>
+          </p:cNvPr>
+          <p:cNvSpPr>
+            <a:spLocks noGrp="1"/>
+          </p:cNvSpPr>
+          <p:nvPr>
+            <p:ph type="title"/>
+          </p:nvPr>
+        </p:nvSpPr>
+        <p:spPr/>
+        <p:txBody>
+          <a:bodyPr>
+            <a:normAutofit/>
+          </a:bodyPr>
+          <a:lstStyle/>
+          <a:p>
+            <a:r>
+              <a:rPr lang="en-US" dirty="0"/>
+              <a:t>Comparisons (rank)</a:t>
+            </a:r>
+          </a:p>
+        </p:txBody>
+      </p:sp>
+      <p:sp>
+        <p:nvSpPr>
+          <p:cNvPr id="3" name="Content Placeholder 2">
+            <a:extLst>
+              <a:ext uri="{FF2B5EF4-FFF2-40B4-BE49-F238E27FC236}">
+                <a16:creationId xmlns:a16="http://schemas.microsoft.com/office/drawing/2014/main" id="{F0D4F734-6154-A9C8-A362-34EB9DF03C1D}"/>
+              </a:ext>
+            </a:extLst>
+          </p:cNvPr>
+          <p:cNvSpPr>
+            <a:spLocks noGrp="1"/>
+          </p:cNvSpPr>
+          <p:nvPr>
+            <p:ph idx="1"/>
+          </p:nvPr>
+        </p:nvSpPr>
+        <p:spPr/>
+        <p:txBody>
+          <a:bodyPr/>
+          <a:lstStyle/>
+          <a:p>
+            <a:r>
+              <a:rPr lang="en-US" dirty="0"/>
+              <a:t>Bar charts: Simple stat comparisons (points per game by player)</a:t>
+            </a:r>
+          </a:p>
+          <a:p>
+            <a:r>
+              <a:rPr lang="en-US" dirty="0"/>
+              <a:t>Grouped/stacked bars: Multi-category comparisons (shooting % by zone)</a:t>
+            </a:r>
+          </a:p>
+          <a:p>
+            <a:r>
+              <a:rPr lang="en-US" dirty="0"/>
+              <a:t>Dot plots: Clean alternative to bars, especially for rankings</a:t>
+            </a:r>
+          </a:p>
+          <a:p>
+            <a:r>
+              <a:rPr lang="en-US" dirty="0"/>
+              <a:t>Radar/spider charts: Multi-dimensional player comparisons (use cautiously!)</a:t>
+            </a:r>
+          </a:p>
+          <a:p>
+            <a:endParaRPr lang="en-US" dirty="0"/>
+          </a:p>
+        </p:txBody>
+      </p:sp>
+      <p:sp>
+        <p:nvSpPr>
+          <p:cNvPr id="4" name="Slide Number Placeholder 3">
+            <a:extLst>
+              <a:ext uri="{FF2B5EF4-FFF2-40B4-BE49-F238E27FC236}">
+                <a16:creationId xmlns:a16="http://schemas.microsoft.com/office/drawing/2014/main" id="{E2910D20-7BB4-8BCC-314D-CF805A8463C6}"/>
+              </a:ext>
+            </a:extLst>
+          </p:cNvPr>
+          <p:cNvSpPr>
+            <a:spLocks noGrp="1"/>
+          </p:cNvSpPr>
+          <p:nvPr>
+            <p:ph type="sldNum" sz="quarter" idx="12"/>
+          </p:nvPr>
+        </p:nvSpPr>
+        <p:spPr/>
+        <p:txBody>
+          <a:bodyPr/>
+          <a:lstStyle/>
+          <a:p>
+            <a:fld id="{45C00377-489B-40EC-B059-26BDDD2E89B9}" type="slidenum">
+              <a:rPr lang="en-US" smtClean="0"/>
+              <a:pPr/>
+              <a:t>26</a:t>
+            </a:fld>
+            <a:endParaRPr lang="en-US" dirty="0"/>
+          </a:p>
+        </p:txBody>
+      </p:sp>
+      <p:pic>
+        <p:nvPicPr>
+          <p:cNvPr id="6" name="Picture 5">
+            <a:extLst>
+              <a:ext uri="{FF2B5EF4-FFF2-40B4-BE49-F238E27FC236}">
+                <a16:creationId xmlns:a16="http://schemas.microsoft.com/office/drawing/2014/main" id="{CAD81678-C0F1-63E8-65AF-98C56EAB86E9}"/>
+              </a:ext>
+            </a:extLst>
+          </p:cNvPr>
+          <p:cNvPicPr>
+            <a:picLocks noChangeAspect="1"/>
+          </p:cNvPicPr>
+          <p:nvPr/>
+        </p:nvPicPr>
+        <p:blipFill>
+          <a:blip r:embed="rId2"/>
+          <a:stretch>
+            <a:fillRect/>
+          </a:stretch>
+        </p:blipFill>
+        <p:spPr>
+          <a:xfrm>
+            <a:off x="2976161" y="5033803"/>
+            <a:ext cx="1200318" cy="1143160"/>
+          </a:xfrm>
+          <a:prstGeom prst="rect">
+            <a:avLst/>
+          </a:prstGeom>
+        </p:spPr>
+      </p:pic>
+      <p:pic>
+        <p:nvPicPr>
+          <p:cNvPr id="8" name="Picture 7">
+            <a:extLst>
+              <a:ext uri="{FF2B5EF4-FFF2-40B4-BE49-F238E27FC236}">
+                <a16:creationId xmlns:a16="http://schemas.microsoft.com/office/drawing/2014/main" id="{D60DA242-D6F9-4C30-13D7-8348F4760F5E}"/>
+              </a:ext>
+            </a:extLst>
+          </p:cNvPr>
+          <p:cNvPicPr>
+            <a:picLocks noChangeAspect="1"/>
+          </p:cNvPicPr>
+          <p:nvPr/>
+        </p:nvPicPr>
+        <p:blipFill>
+          <a:blip r:embed="rId3"/>
+          <a:stretch>
+            <a:fillRect/>
+          </a:stretch>
+        </p:blipFill>
+        <p:spPr>
+          <a:xfrm>
+            <a:off x="5423454" y="4988083"/>
+            <a:ext cx="1162212" cy="1105054"/>
+          </a:xfrm>
+          <a:prstGeom prst="rect">
+            <a:avLst/>
+          </a:prstGeom>
+        </p:spPr>
+      </p:pic>
+      <p:pic>
+        <p:nvPicPr>
+          <p:cNvPr id="10" name="Picture 9">
+            <a:extLst>
+              <a:ext uri="{FF2B5EF4-FFF2-40B4-BE49-F238E27FC236}">
+                <a16:creationId xmlns:a16="http://schemas.microsoft.com/office/drawing/2014/main" id="{5EB175A5-9673-0A59-A229-9DF3A738048B}"/>
+              </a:ext>
+            </a:extLst>
+          </p:cNvPr>
+          <p:cNvPicPr>
+            <a:picLocks noChangeAspect="1"/>
+          </p:cNvPicPr>
+          <p:nvPr/>
+        </p:nvPicPr>
+        <p:blipFill>
+          <a:blip r:embed="rId4"/>
+          <a:stretch>
+            <a:fillRect/>
+          </a:stretch>
+        </p:blipFill>
+        <p:spPr>
+          <a:xfrm>
+            <a:off x="8398153" y="4959504"/>
+            <a:ext cx="1143160" cy="1133633"/>
+          </a:xfrm>
+          <a:prstGeom prst="rect">
+            <a:avLst/>
+          </a:prstGeom>
+        </p:spPr>
+      </p:pic>
+    </p:spTree>
+    <p:extLst>
+      <p:ext uri="{BB962C8B-B14F-4D97-AF65-F5344CB8AC3E}">
+        <p14:creationId xmlns:p14="http://schemas.microsoft.com/office/powerpoint/2010/main" val="2454783734"/>
+      </p:ext>
+    </p:extLst>
+  </p:cSld>
+  <p:clrMapOvr>
+    <a:masterClrMapping/>
+  </p:clrMapOvr>
+</p:sld>
+</file>
+
+<file path=ppt/slides/slide27.xml><?xml version="1.0" encoding="utf-8"?>
+<p:sld xmlns:a="http://schemas.openxmlformats.org/drawingml/2006/main" xmlns:r="http://schemas.openxmlformats.org/officeDocument/2006/relationships" xmlns:p="http://schemas.openxmlformats.org/presentationml/2006/main">
+  <p:cSld>
+    <p:spTree>
+      <p:nvGrpSpPr>
+        <p:cNvPr id="1" name=""/>
+        <p:cNvGrpSpPr/>
+        <p:nvPr/>
+      </p:nvGrpSpPr>
+      <p:grpSpPr>
+        <a:xfrm>
+          <a:off x="0" y="0"/>
+          <a:ext cx="0" cy="0"/>
+          <a:chOff x="0" y="0"/>
+          <a:chExt cx="0" cy="0"/>
+        </a:xfrm>
+      </p:grpSpPr>
+      <p:sp>
+        <p:nvSpPr>
+          <p:cNvPr id="2" name="Title 1">
+            <a:extLst>
+              <a:ext uri="{FF2B5EF4-FFF2-40B4-BE49-F238E27FC236}">
                 <a16:creationId xmlns:a16="http://schemas.microsoft.com/office/drawing/2014/main" id="{285F1593-F2E7-A0A0-4235-5DCA483B9338}"/>
               </a:ext>
             </a:extLst>
@@ -8657,7 +8885,7 @@
           <a:p>
             <a:r>
               <a:rPr lang="en-US" dirty="0"/>
-              <a:t>distribution</a:t>
+              <a:t>Distribution</a:t>
             </a:r>
           </a:p>
         </p:txBody>
@@ -8735,7 +8963,7 @@
             <a:fld id="{45C00377-489B-40EC-B059-26BDDD2E89B9}" type="slidenum">
               <a:rPr lang="en-US" smtClean="0"/>
               <a:pPr/>
-              <a:t>26</a:t>
+              <a:t>27</a:t>
             </a:fld>
             <a:endParaRPr lang="en-US" dirty="0"/>
           </a:p>
@@ -8815,179 +9043,6 @@
 </p:sld>
 </file>
 
-<file path=ppt/slides/slide27.xml><?xml version="1.0" encoding="utf-8"?>
-<p:sld xmlns:a="http://schemas.openxmlformats.org/drawingml/2006/main" xmlns:r="http://schemas.openxmlformats.org/officeDocument/2006/relationships" xmlns:p="http://schemas.openxmlformats.org/presentationml/2006/main">
-  <p:cSld>
-    <p:spTree>
-      <p:nvGrpSpPr>
-        <p:cNvPr id="1" name="">
-          <a:extLst>
-            <a:ext uri="{FF2B5EF4-FFF2-40B4-BE49-F238E27FC236}">
-              <a16:creationId xmlns:a16="http://schemas.microsoft.com/office/drawing/2014/main" id="{F90AE914-6399-D19B-BAF0-C90A269BB88D}"/>
-            </a:ext>
-          </a:extLst>
-        </p:cNvPr>
-        <p:cNvGrpSpPr/>
-        <p:nvPr/>
-      </p:nvGrpSpPr>
-      <p:grpSpPr>
-        <a:xfrm>
-          <a:off x="0" y="0"/>
-          <a:ext cx="0" cy="0"/>
-          <a:chOff x="0" y="0"/>
-          <a:chExt cx="0" cy="0"/>
-        </a:xfrm>
-      </p:grpSpPr>
-      <p:sp>
-        <p:nvSpPr>
-          <p:cNvPr id="2" name="Title 1">
-            <a:extLst>
-              <a:ext uri="{FF2B5EF4-FFF2-40B4-BE49-F238E27FC236}">
-                <a16:creationId xmlns:a16="http://schemas.microsoft.com/office/drawing/2014/main" id="{40A51137-DFF6-0E27-4C23-A158DEA8C312}"/>
-              </a:ext>
-            </a:extLst>
-          </p:cNvPr>
-          <p:cNvSpPr>
-            <a:spLocks noGrp="1"/>
-          </p:cNvSpPr>
-          <p:nvPr>
-            <p:ph type="title"/>
-          </p:nvPr>
-        </p:nvSpPr>
-        <p:spPr/>
-        <p:txBody>
-          <a:bodyPr/>
-          <a:lstStyle/>
-          <a:p>
-            <a:r>
-              <a:rPr lang="en-US" dirty="0"/>
-              <a:t>distribution</a:t>
-            </a:r>
-          </a:p>
-        </p:txBody>
-      </p:sp>
-      <p:sp>
-        <p:nvSpPr>
-          <p:cNvPr id="3" name="Content Placeholder 2">
-            <a:extLst>
-              <a:ext uri="{FF2B5EF4-FFF2-40B4-BE49-F238E27FC236}">
-                <a16:creationId xmlns:a16="http://schemas.microsoft.com/office/drawing/2014/main" id="{6BE3D9AA-549F-606F-B3F5-5C861CA7E41A}"/>
-              </a:ext>
-            </a:extLst>
-          </p:cNvPr>
-          <p:cNvSpPr>
-            <a:spLocks noGrp="1"/>
-          </p:cNvSpPr>
-          <p:nvPr>
-            <p:ph idx="1"/>
-          </p:nvPr>
-        </p:nvSpPr>
-        <p:spPr/>
-        <p:txBody>
-          <a:bodyPr/>
-          <a:lstStyle/>
-          <a:p>
-            <a:r>
-              <a:rPr lang="en-US" dirty="0"/>
-              <a:t>Histograms: Player height distribution, shot distance distribution</a:t>
-            </a:r>
-          </a:p>
-          <a:p>
-            <a:r>
-              <a:rPr lang="en-US" dirty="0"/>
-              <a:t>Density plots: Smoothed shooting ranges</a:t>
-            </a:r>
-          </a:p>
-          <a:p>
-            <a:r>
-              <a:rPr lang="en-US" dirty="0"/>
-              <a:t>Box plots: Comparing stat distributions across positions or teams</a:t>
-            </a:r>
-          </a:p>
-          <a:p>
-            <a:r>
-              <a:rPr lang="en-US" dirty="0"/>
-              <a:t>Violin plots: Showing full distribution shape (sprint speeds by position)</a:t>
-            </a:r>
-          </a:p>
-          <a:p>
-            <a:endParaRPr lang="en-US" dirty="0"/>
-          </a:p>
-        </p:txBody>
-      </p:sp>
-      <p:sp>
-        <p:nvSpPr>
-          <p:cNvPr id="4" name="Slide Number Placeholder 3">
-            <a:extLst>
-              <a:ext uri="{FF2B5EF4-FFF2-40B4-BE49-F238E27FC236}">
-                <a16:creationId xmlns:a16="http://schemas.microsoft.com/office/drawing/2014/main" id="{C9CC9DD0-0ABD-BF1F-BB74-52877A4D11A5}"/>
-              </a:ext>
-            </a:extLst>
-          </p:cNvPr>
-          <p:cNvSpPr>
-            <a:spLocks noGrp="1"/>
-          </p:cNvSpPr>
-          <p:nvPr>
-            <p:ph type="sldNum" sz="quarter" idx="12"/>
-          </p:nvPr>
-        </p:nvSpPr>
-        <p:spPr/>
-        <p:txBody>
-          <a:bodyPr/>
-          <a:lstStyle/>
-          <a:p>
-            <a:fld id="{45C00377-489B-40EC-B059-26BDDD2E89B9}" type="slidenum">
-              <a:rPr lang="en-US" smtClean="0"/>
-              <a:pPr/>
-              <a:t>27</a:t>
-            </a:fld>
-            <a:endParaRPr lang="en-US" dirty="0"/>
-          </a:p>
-        </p:txBody>
-      </p:sp>
-      <p:pic>
-        <p:nvPicPr>
-          <p:cNvPr id="10" name="Picture 9">
-            <a:extLst>
-              <a:ext uri="{FF2B5EF4-FFF2-40B4-BE49-F238E27FC236}">
-                <a16:creationId xmlns:a16="http://schemas.microsoft.com/office/drawing/2014/main" id="{620DB94C-EC6F-313A-E8E9-313248E52B2D}"/>
-              </a:ext>
-            </a:extLst>
-          </p:cNvPr>
-          <p:cNvPicPr>
-            <a:picLocks noChangeAspect="1"/>
-          </p:cNvPicPr>
-          <p:nvPr/>
-        </p:nvPicPr>
-        <p:blipFill>
-          <a:blip r:embed="rId2"/>
-          <a:stretch>
-            <a:fillRect/>
-          </a:stretch>
-        </p:blipFill>
-        <p:spPr>
-          <a:xfrm>
-            <a:off x="3756139" y="4545840"/>
-            <a:ext cx="4679721" cy="1631123"/>
-          </a:xfrm>
-          <a:prstGeom prst="rect">
-            <a:avLst/>
-          </a:prstGeom>
-        </p:spPr>
-      </p:pic>
-    </p:spTree>
-    <p:extLst>
-      <p:ext uri="{BB962C8B-B14F-4D97-AF65-F5344CB8AC3E}">
-        <p14:creationId xmlns:p14="http://schemas.microsoft.com/office/powerpoint/2010/main" val="1117615053"/>
-      </p:ext>
-    </p:extLst>
-  </p:cSld>
-  <p:clrMapOvr>
-    <a:masterClrMapping/>
-  </p:clrMapOvr>
-</p:sld>
-</file>
-
 <file path=ppt/slides/slide28.xml><?xml version="1.0" encoding="utf-8"?>
 <p:sld xmlns:a="http://schemas.openxmlformats.org/drawingml/2006/main" xmlns:r="http://schemas.openxmlformats.org/officeDocument/2006/relationships" xmlns:p="http://schemas.openxmlformats.org/presentationml/2006/main">
   <p:cSld>
@@ -9010,7 +9065,7 @@
           <p:cNvPr id="2" name="Title 1">
             <a:extLst>
               <a:ext uri="{FF2B5EF4-FFF2-40B4-BE49-F238E27FC236}">
-                <a16:creationId xmlns:a16="http://schemas.microsoft.com/office/drawing/2014/main" id="{22E57BA0-78E2-3F36-B68F-77FFEAAD4AA5}"/>
+                <a16:creationId xmlns:a16="http://schemas.microsoft.com/office/drawing/2014/main" id="{4013BC37-5B5E-79EE-8A29-38BC58CF756A}"/>
               </a:ext>
             </a:extLst>
           </p:cNvPr>
@@ -9023,14 +9078,12 @@
         </p:nvSpPr>
         <p:spPr/>
         <p:txBody>
-          <a:bodyPr>
-            <a:normAutofit/>
-          </a:bodyPr>
+          <a:bodyPr/>
           <a:lstStyle/>
           <a:p>
             <a:r>
               <a:rPr lang="en-US" dirty="0"/>
-              <a:t>Comparisons (rank)</a:t>
+              <a:t>Relationships</a:t>
             </a:r>
           </a:p>
         </p:txBody>
@@ -9040,7 +9093,7 @@
           <p:cNvPr id="3" name="Content Placeholder 2">
             <a:extLst>
               <a:ext uri="{FF2B5EF4-FFF2-40B4-BE49-F238E27FC236}">
-                <a16:creationId xmlns:a16="http://schemas.microsoft.com/office/drawing/2014/main" id="{F0D4F734-6154-A9C8-A362-34EB9DF03C1D}"/>
+                <a16:creationId xmlns:a16="http://schemas.microsoft.com/office/drawing/2014/main" id="{A3DF0359-11C9-47B0-F490-B0B74F7AB7F9}"/>
               </a:ext>
             </a:extLst>
           </p:cNvPr>
@@ -9058,25 +9111,23 @@
           <a:p>
             <a:r>
               <a:rPr lang="en-US" dirty="0"/>
-              <a:t>Bar charts: Simple stat comparisons (points per game by player)</a:t>
+              <a:t>Scatter plots: Exploring correlations (height vs. rebounding)</a:t>
             </a:r>
           </a:p>
           <a:p>
             <a:r>
               <a:rPr lang="en-US" dirty="0"/>
-              <a:t>Grouped/stacked bars: Multi-category comparisons (shooting % by zone)</a:t>
-            </a:r>
-          </a:p>
-          <a:p>
+              <a:t>Correlation matrices: Multiple pairwise correlation</a:t>
+            </a:r>
+          </a:p>
+          <a:p>
+            <a:r>
+              <a:rPr lang="en-US" dirty="0" err="1"/>
+              <a:t>Hexbin</a:t>
+            </a:r>
             <a:r>
               <a:rPr lang="en-US" dirty="0"/>
-              <a:t>Dot plots: Clean alternative to bars, especially for rankings</a:t>
-            </a:r>
-          </a:p>
-          <a:p>
-            <a:r>
-              <a:rPr lang="en-US" dirty="0"/>
-              <a:t>Radar/spider charts: Multi-dimensional player comparisons (use cautiously!)</a:t>
+              <a:t> plots: scatter plots with aggregation (shot charts)</a:t>
             </a:r>
           </a:p>
           <a:p>
@@ -9089,7 +9140,7 @@
           <p:cNvPr id="4" name="Slide Number Placeholder 3">
             <a:extLst>
               <a:ext uri="{FF2B5EF4-FFF2-40B4-BE49-F238E27FC236}">
-                <a16:creationId xmlns:a16="http://schemas.microsoft.com/office/drawing/2014/main" id="{E2910D20-7BB4-8BCC-314D-CF805A8463C6}"/>
+                <a16:creationId xmlns:a16="http://schemas.microsoft.com/office/drawing/2014/main" id="{79314446-E47F-0111-7142-2A51636E37A1}"/>
               </a:ext>
             </a:extLst>
           </p:cNvPr>
@@ -9119,7 +9170,7 @@
           <p:cNvPr id="6" name="Picture 5">
             <a:extLst>
               <a:ext uri="{FF2B5EF4-FFF2-40B4-BE49-F238E27FC236}">
-                <a16:creationId xmlns:a16="http://schemas.microsoft.com/office/drawing/2014/main" id="{CAD81678-C0F1-63E8-65AF-98C56EAB86E9}"/>
+                <a16:creationId xmlns:a16="http://schemas.microsoft.com/office/drawing/2014/main" id="{B916F363-37A5-B7AB-C478-A7D8C244EF93}"/>
               </a:ext>
             </a:extLst>
           </p:cNvPr>
@@ -9136,8 +9187,8 @@
         </p:blipFill>
         <p:spPr>
           <a:xfrm>
-            <a:off x="2976161" y="5033803"/>
-            <a:ext cx="1200318" cy="1143160"/>
+            <a:off x="3195879" y="4823622"/>
+            <a:ext cx="1086002" cy="1114581"/>
           </a:xfrm>
           <a:prstGeom prst="rect">
             <a:avLst/>
@@ -9149,7 +9200,7 @@
           <p:cNvPr id="8" name="Picture 7">
             <a:extLst>
               <a:ext uri="{FF2B5EF4-FFF2-40B4-BE49-F238E27FC236}">
-                <a16:creationId xmlns:a16="http://schemas.microsoft.com/office/drawing/2014/main" id="{D60DA242-D6F9-4C30-13D7-8348F4760F5E}"/>
+                <a16:creationId xmlns:a16="http://schemas.microsoft.com/office/drawing/2014/main" id="{55CA5EA7-974A-D1DA-43C5-B2F7166BC794}"/>
               </a:ext>
             </a:extLst>
           </p:cNvPr>
@@ -9166,38 +9217,8 @@
         </p:blipFill>
         <p:spPr>
           <a:xfrm>
-            <a:off x="5423454" y="4988083"/>
-            <a:ext cx="1162212" cy="1105054"/>
-          </a:xfrm>
-          <a:prstGeom prst="rect">
-            <a:avLst/>
-          </a:prstGeom>
-        </p:spPr>
-      </p:pic>
-      <p:pic>
-        <p:nvPicPr>
-          <p:cNvPr id="10" name="Picture 9">
-            <a:extLst>
-              <a:ext uri="{FF2B5EF4-FFF2-40B4-BE49-F238E27FC236}">
-                <a16:creationId xmlns:a16="http://schemas.microsoft.com/office/drawing/2014/main" id="{5EB175A5-9673-0A59-A229-9DF3A738048B}"/>
-              </a:ext>
-            </a:extLst>
-          </p:cNvPr>
-          <p:cNvPicPr>
-            <a:picLocks noChangeAspect="1"/>
-          </p:cNvPicPr>
-          <p:nvPr/>
-        </p:nvPicPr>
-        <p:blipFill>
-          <a:blip r:embed="rId4"/>
-          <a:stretch>
-            <a:fillRect/>
-          </a:stretch>
-        </p:blipFill>
-        <p:spPr>
-          <a:xfrm>
-            <a:off x="8398153" y="4959504"/>
-            <a:ext cx="1143160" cy="1133633"/>
+            <a:off x="6881097" y="4814096"/>
+            <a:ext cx="1152686" cy="1124107"/>
           </a:xfrm>
           <a:prstGeom prst="rect">
             <a:avLst/>
@@ -9207,7 +9228,7 @@
     </p:spTree>
     <p:extLst>
       <p:ext uri="{BB962C8B-B14F-4D97-AF65-F5344CB8AC3E}">
-        <p14:creationId xmlns:p14="http://schemas.microsoft.com/office/powerpoint/2010/main" val="2454783734"/>
+        <p14:creationId xmlns:p14="http://schemas.microsoft.com/office/powerpoint/2010/main" val="608507110"/>
       </p:ext>
     </p:extLst>
   </p:cSld>
@@ -9239,7 +9260,7 @@
           <p:cNvPr id="2" name="Title 1">
             <a:extLst>
               <a:ext uri="{FF2B5EF4-FFF2-40B4-BE49-F238E27FC236}">
-                <a16:creationId xmlns:a16="http://schemas.microsoft.com/office/drawing/2014/main" id="{4013BC37-5B5E-79EE-8A29-38BC58CF756A}"/>
+                <a16:creationId xmlns:a16="http://schemas.microsoft.com/office/drawing/2014/main" id="{181BD59E-A5C2-40A2-C9F7-71E7A43142D1}"/>
               </a:ext>
             </a:extLst>
           </p:cNvPr>
@@ -9252,12 +9273,14 @@
         </p:nvSpPr>
         <p:spPr/>
         <p:txBody>
-          <a:bodyPr/>
+          <a:bodyPr>
+            <a:normAutofit/>
+          </a:bodyPr>
           <a:lstStyle/>
           <a:p>
             <a:r>
               <a:rPr lang="en-US" dirty="0"/>
-              <a:t>Relationships</a:t>
+              <a:t>Part-to-whole</a:t>
             </a:r>
           </a:p>
         </p:txBody>
@@ -9267,7 +9290,7 @@
           <p:cNvPr id="3" name="Content Placeholder 2">
             <a:extLst>
               <a:ext uri="{FF2B5EF4-FFF2-40B4-BE49-F238E27FC236}">
-                <a16:creationId xmlns:a16="http://schemas.microsoft.com/office/drawing/2014/main" id="{A3DF0359-11C9-47B0-F490-B0B74F7AB7F9}"/>
+                <a16:creationId xmlns:a16="http://schemas.microsoft.com/office/drawing/2014/main" id="{493A25C8-6278-66C0-8EAC-58A49D918EC1}"/>
               </a:ext>
             </a:extLst>
           </p:cNvPr>
@@ -9285,27 +9308,20 @@
           <a:p>
             <a:r>
               <a:rPr lang="en-US" dirty="0"/>
-              <a:t>Scatter plots: Exploring correlations (height vs. rebounding)</a:t>
+              <a:t>Stacked bars: Composition of team offense (3PT vs. 2PT vs. FT)</a:t>
             </a:r>
           </a:p>
           <a:p>
             <a:r>
               <a:rPr lang="en-US" dirty="0"/>
-              <a:t>Correlation matrices: Multiple pairwise correlation</a:t>
-            </a:r>
-          </a:p>
-          <a:p>
-            <a:r>
-              <a:rPr lang="en-US" dirty="0" err="1"/>
-              <a:t>Hexbin</a:t>
-            </a:r>
+              <a:t>Tree maps: Allocating playing time or usage</a:t>
+            </a:r>
+          </a:p>
+          <a:p>
             <a:r>
               <a:rPr lang="en-US" dirty="0"/>
-              <a:t> plots: scatter plots with aggregation (shot charts)</a:t>
-            </a:r>
-          </a:p>
-          <a:p>
-            <a:endParaRPr lang="en-US" dirty="0"/>
+              <a:t>Pie charts: use cautiously</a:t>
+            </a:r>
           </a:p>
         </p:txBody>
       </p:sp>
@@ -9314,7 +9330,7 @@
           <p:cNvPr id="4" name="Slide Number Placeholder 3">
             <a:extLst>
               <a:ext uri="{FF2B5EF4-FFF2-40B4-BE49-F238E27FC236}">
-                <a16:creationId xmlns:a16="http://schemas.microsoft.com/office/drawing/2014/main" id="{79314446-E47F-0111-7142-2A51636E37A1}"/>
+                <a16:creationId xmlns:a16="http://schemas.microsoft.com/office/drawing/2014/main" id="{CF174C96-0ECF-F7B9-773A-D409FC351F67}"/>
               </a:ext>
             </a:extLst>
           </p:cNvPr>
@@ -9341,10 +9357,10 @@
       </p:sp>
       <p:pic>
         <p:nvPicPr>
-          <p:cNvPr id="6" name="Picture 5">
-            <a:extLst>
-              <a:ext uri="{FF2B5EF4-FFF2-40B4-BE49-F238E27FC236}">
-                <a16:creationId xmlns:a16="http://schemas.microsoft.com/office/drawing/2014/main" id="{B916F363-37A5-B7AB-C478-A7D8C244EF93}"/>
+          <p:cNvPr id="5" name="Picture 4">
+            <a:extLst>
+              <a:ext uri="{FF2B5EF4-FFF2-40B4-BE49-F238E27FC236}">
+                <a16:creationId xmlns:a16="http://schemas.microsoft.com/office/drawing/2014/main" id="{893999F2-3185-6899-67FA-BC71144ED44D}"/>
               </a:ext>
             </a:extLst>
           </p:cNvPr>
@@ -9361,8 +9377,8 @@
         </p:blipFill>
         <p:spPr>
           <a:xfrm>
-            <a:off x="3195879" y="4823622"/>
-            <a:ext cx="1086002" cy="1114581"/>
+            <a:off x="3705073" y="4324366"/>
+            <a:ext cx="1162212" cy="1105054"/>
           </a:xfrm>
           <a:prstGeom prst="rect">
             <a:avLst/>
@@ -9371,10 +9387,10 @@
       </p:pic>
       <p:pic>
         <p:nvPicPr>
-          <p:cNvPr id="8" name="Picture 7">
-            <a:extLst>
-              <a:ext uri="{FF2B5EF4-FFF2-40B4-BE49-F238E27FC236}">
-                <a16:creationId xmlns:a16="http://schemas.microsoft.com/office/drawing/2014/main" id="{55CA5EA7-974A-D1DA-43C5-B2F7166BC794}"/>
+          <p:cNvPr id="7" name="Picture 6">
+            <a:extLst>
+              <a:ext uri="{FF2B5EF4-FFF2-40B4-BE49-F238E27FC236}">
+                <a16:creationId xmlns:a16="http://schemas.microsoft.com/office/drawing/2014/main" id="{3F7368AA-0850-42AA-F1C0-3EE8BB3CA88E}"/>
               </a:ext>
             </a:extLst>
           </p:cNvPr>
@@ -9391,8 +9407,8 @@
         </p:blipFill>
         <p:spPr>
           <a:xfrm>
-            <a:off x="6881097" y="4814096"/>
-            <a:ext cx="1152686" cy="1124107"/>
+            <a:off x="7138762" y="4267208"/>
+            <a:ext cx="1190791" cy="1162212"/>
           </a:xfrm>
           <a:prstGeom prst="rect">
             <a:avLst/>
@@ -9402,7 +9418,7 @@
     </p:spTree>
     <p:extLst>
       <p:ext uri="{BB962C8B-B14F-4D97-AF65-F5344CB8AC3E}">
-        <p14:creationId xmlns:p14="http://schemas.microsoft.com/office/powerpoint/2010/main" val="608507110"/>
+        <p14:creationId xmlns:p14="http://schemas.microsoft.com/office/powerpoint/2010/main" val="4126343463"/>
       </p:ext>
     </p:extLst>
   </p:cSld>
@@ -9570,7 +9586,7 @@
           <p:cNvPr id="2" name="Title 1">
             <a:extLst>
               <a:ext uri="{FF2B5EF4-FFF2-40B4-BE49-F238E27FC236}">
-                <a16:creationId xmlns:a16="http://schemas.microsoft.com/office/drawing/2014/main" id="{181BD59E-A5C2-40A2-C9F7-71E7A43142D1}"/>
+                <a16:creationId xmlns:a16="http://schemas.microsoft.com/office/drawing/2014/main" id="{4A2080A0-119A-029C-E094-BDC0A5823392}"/>
               </a:ext>
             </a:extLst>
           </p:cNvPr>
@@ -9590,7 +9606,7 @@
           <a:p>
             <a:r>
               <a:rPr lang="en-US" dirty="0"/>
-              <a:t>Part-to-whole</a:t>
+              <a:t>Time series</a:t>
             </a:r>
           </a:p>
         </p:txBody>
@@ -9600,7 +9616,7 @@
           <p:cNvPr id="3" name="Content Placeholder 2">
             <a:extLst>
               <a:ext uri="{FF2B5EF4-FFF2-40B4-BE49-F238E27FC236}">
-                <a16:creationId xmlns:a16="http://schemas.microsoft.com/office/drawing/2014/main" id="{493A25C8-6278-66C0-8EAC-58A49D918EC1}"/>
+                <a16:creationId xmlns:a16="http://schemas.microsoft.com/office/drawing/2014/main" id="{FDD91642-91F6-BA8F-B509-CEBCDF5AD953}"/>
               </a:ext>
             </a:extLst>
           </p:cNvPr>
@@ -9618,19 +9634,13 @@
           <a:p>
             <a:r>
               <a:rPr lang="en-US" dirty="0"/>
-              <a:t>Stacked bars: Composition of team offense (3PT vs. 2PT vs. FT)</a:t>
+              <a:t>Line charts: Performance over season, in-game momentum</a:t>
             </a:r>
           </a:p>
           <a:p>
             <a:r>
               <a:rPr lang="en-US" dirty="0"/>
-              <a:t>Tree maps: Allocating playing time or usage</a:t>
-            </a:r>
-          </a:p>
-          <a:p>
-            <a:r>
-              <a:rPr lang="en-US" dirty="0"/>
-              <a:t>Pie charts: use cautiously</a:t>
+              <a:t>Area charts: Cumulative stats over time</a:t>
             </a:r>
           </a:p>
         </p:txBody>
@@ -9640,7 +9650,7 @@
           <p:cNvPr id="4" name="Slide Number Placeholder 3">
             <a:extLst>
               <a:ext uri="{FF2B5EF4-FFF2-40B4-BE49-F238E27FC236}">
-                <a16:creationId xmlns:a16="http://schemas.microsoft.com/office/drawing/2014/main" id="{CF174C96-0ECF-F7B9-773A-D409FC351F67}"/>
+                <a16:creationId xmlns:a16="http://schemas.microsoft.com/office/drawing/2014/main" id="{9ABB9AAD-2CD6-09AE-9FF8-BD548FEC7802}"/>
               </a:ext>
             </a:extLst>
           </p:cNvPr>
@@ -9660,190 +9670,6 @@
               <a:rPr lang="en-US" smtClean="0"/>
               <a:pPr/>
               <a:t>30</a:t>
-            </a:fld>
-            <a:endParaRPr lang="en-US" dirty="0"/>
-          </a:p>
-        </p:txBody>
-      </p:sp>
-      <p:pic>
-        <p:nvPicPr>
-          <p:cNvPr id="5" name="Picture 4">
-            <a:extLst>
-              <a:ext uri="{FF2B5EF4-FFF2-40B4-BE49-F238E27FC236}">
-                <a16:creationId xmlns:a16="http://schemas.microsoft.com/office/drawing/2014/main" id="{893999F2-3185-6899-67FA-BC71144ED44D}"/>
-              </a:ext>
-            </a:extLst>
-          </p:cNvPr>
-          <p:cNvPicPr>
-            <a:picLocks noChangeAspect="1"/>
-          </p:cNvPicPr>
-          <p:nvPr/>
-        </p:nvPicPr>
-        <p:blipFill>
-          <a:blip r:embed="rId2"/>
-          <a:stretch>
-            <a:fillRect/>
-          </a:stretch>
-        </p:blipFill>
-        <p:spPr>
-          <a:xfrm>
-            <a:off x="3705073" y="4324366"/>
-            <a:ext cx="1162212" cy="1105054"/>
-          </a:xfrm>
-          <a:prstGeom prst="rect">
-            <a:avLst/>
-          </a:prstGeom>
-        </p:spPr>
-      </p:pic>
-      <p:pic>
-        <p:nvPicPr>
-          <p:cNvPr id="7" name="Picture 6">
-            <a:extLst>
-              <a:ext uri="{FF2B5EF4-FFF2-40B4-BE49-F238E27FC236}">
-                <a16:creationId xmlns:a16="http://schemas.microsoft.com/office/drawing/2014/main" id="{3F7368AA-0850-42AA-F1C0-3EE8BB3CA88E}"/>
-              </a:ext>
-            </a:extLst>
-          </p:cNvPr>
-          <p:cNvPicPr>
-            <a:picLocks noChangeAspect="1"/>
-          </p:cNvPicPr>
-          <p:nvPr/>
-        </p:nvPicPr>
-        <p:blipFill>
-          <a:blip r:embed="rId3"/>
-          <a:stretch>
-            <a:fillRect/>
-          </a:stretch>
-        </p:blipFill>
-        <p:spPr>
-          <a:xfrm>
-            <a:off x="7138762" y="4267208"/>
-            <a:ext cx="1190791" cy="1162212"/>
-          </a:xfrm>
-          <a:prstGeom prst="rect">
-            <a:avLst/>
-          </a:prstGeom>
-        </p:spPr>
-      </p:pic>
-    </p:spTree>
-    <p:extLst>
-      <p:ext uri="{BB962C8B-B14F-4D97-AF65-F5344CB8AC3E}">
-        <p14:creationId xmlns:p14="http://schemas.microsoft.com/office/powerpoint/2010/main" val="4126343463"/>
-      </p:ext>
-    </p:extLst>
-  </p:cSld>
-  <p:clrMapOvr>
-    <a:masterClrMapping/>
-  </p:clrMapOvr>
-</p:sld>
-</file>
-
-<file path=ppt/slides/slide31.xml><?xml version="1.0" encoding="utf-8"?>
-<p:sld xmlns:a="http://schemas.openxmlformats.org/drawingml/2006/main" xmlns:r="http://schemas.openxmlformats.org/officeDocument/2006/relationships" xmlns:p="http://schemas.openxmlformats.org/presentationml/2006/main">
-  <p:cSld>
-    <p:spTree>
-      <p:nvGrpSpPr>
-        <p:cNvPr id="1" name=""/>
-        <p:cNvGrpSpPr/>
-        <p:nvPr/>
-      </p:nvGrpSpPr>
-      <p:grpSpPr>
-        <a:xfrm>
-          <a:off x="0" y="0"/>
-          <a:ext cx="0" cy="0"/>
-          <a:chOff x="0" y="0"/>
-          <a:chExt cx="0" cy="0"/>
-        </a:xfrm>
-      </p:grpSpPr>
-      <p:sp>
-        <p:nvSpPr>
-          <p:cNvPr id="2" name="Title 1">
-            <a:extLst>
-              <a:ext uri="{FF2B5EF4-FFF2-40B4-BE49-F238E27FC236}">
-                <a16:creationId xmlns:a16="http://schemas.microsoft.com/office/drawing/2014/main" id="{4A2080A0-119A-029C-E094-BDC0A5823392}"/>
-              </a:ext>
-            </a:extLst>
-          </p:cNvPr>
-          <p:cNvSpPr>
-            <a:spLocks noGrp="1"/>
-          </p:cNvSpPr>
-          <p:nvPr>
-            <p:ph type="title"/>
-          </p:nvPr>
-        </p:nvSpPr>
-        <p:spPr/>
-        <p:txBody>
-          <a:bodyPr>
-            <a:normAutofit/>
-          </a:bodyPr>
-          <a:lstStyle/>
-          <a:p>
-            <a:r>
-              <a:rPr lang="en-US" dirty="0"/>
-              <a:t>Time series</a:t>
-            </a:r>
-          </a:p>
-        </p:txBody>
-      </p:sp>
-      <p:sp>
-        <p:nvSpPr>
-          <p:cNvPr id="3" name="Content Placeholder 2">
-            <a:extLst>
-              <a:ext uri="{FF2B5EF4-FFF2-40B4-BE49-F238E27FC236}">
-                <a16:creationId xmlns:a16="http://schemas.microsoft.com/office/drawing/2014/main" id="{FDD91642-91F6-BA8F-B509-CEBCDF5AD953}"/>
-              </a:ext>
-            </a:extLst>
-          </p:cNvPr>
-          <p:cNvSpPr>
-            <a:spLocks noGrp="1"/>
-          </p:cNvSpPr>
-          <p:nvPr>
-            <p:ph idx="1"/>
-          </p:nvPr>
-        </p:nvSpPr>
-        <p:spPr/>
-        <p:txBody>
-          <a:bodyPr/>
-          <a:lstStyle/>
-          <a:p>
-            <a:r>
-              <a:rPr lang="en-US" dirty="0"/>
-              <a:t>Line charts: Performance over season, in-game momentum</a:t>
-            </a:r>
-          </a:p>
-          <a:p>
-            <a:r>
-              <a:rPr lang="en-US" dirty="0"/>
-              <a:t>Area charts: Cumulative stats over time</a:t>
-            </a:r>
-          </a:p>
-        </p:txBody>
-      </p:sp>
-      <p:sp>
-        <p:nvSpPr>
-          <p:cNvPr id="4" name="Slide Number Placeholder 3">
-            <a:extLst>
-              <a:ext uri="{FF2B5EF4-FFF2-40B4-BE49-F238E27FC236}">
-                <a16:creationId xmlns:a16="http://schemas.microsoft.com/office/drawing/2014/main" id="{9ABB9AAD-2CD6-09AE-9FF8-BD548FEC7802}"/>
-              </a:ext>
-            </a:extLst>
-          </p:cNvPr>
-          <p:cNvSpPr>
-            <a:spLocks noGrp="1"/>
-          </p:cNvSpPr>
-          <p:nvPr>
-            <p:ph type="sldNum" sz="quarter" idx="12"/>
-          </p:nvPr>
-        </p:nvSpPr>
-        <p:spPr/>
-        <p:txBody>
-          <a:bodyPr/>
-          <a:lstStyle/>
-          <a:p>
-            <a:fld id="{45C00377-489B-40EC-B059-26BDDD2E89B9}" type="slidenum">
-              <a:rPr lang="en-US" smtClean="0"/>
-              <a:pPr/>
-              <a:t>31</a:t>
             </a:fld>
             <a:endParaRPr lang="en-US" dirty="0"/>
           </a:p>
@@ -9922,7 +9748,7 @@
 </p:sld>
 </file>
 
-<file path=ppt/slides/slide32.xml><?xml version="1.0" encoding="utf-8"?>
+<file path=ppt/slides/slide31.xml><?xml version="1.0" encoding="utf-8"?>
 <p:sld xmlns:a="http://schemas.openxmlformats.org/drawingml/2006/main" xmlns:r="http://schemas.openxmlformats.org/officeDocument/2006/relationships" xmlns:p="http://schemas.openxmlformats.org/presentationml/2006/main">
   <p:cSld>
     <p:spTree>
@@ -10033,7 +9859,7 @@
             <a:fld id="{45C00377-489B-40EC-B059-26BDDD2E89B9}" type="slidenum">
               <a:rPr lang="en-US" smtClean="0"/>
               <a:pPr/>
-              <a:t>32</a:t>
+              <a:t>31</a:t>
             </a:fld>
             <a:endParaRPr lang="en-US" dirty="0"/>
           </a:p>
@@ -10176,7 +10002,7 @@
 </p:sld>
 </file>
 
-<file path=ppt/slides/slide33.xml><?xml version="1.0" encoding="utf-8"?>
+<file path=ppt/slides/slide32.xml><?xml version="1.0" encoding="utf-8"?>
 <p:sld xmlns:a="http://schemas.openxmlformats.org/drawingml/2006/main" xmlns:r="http://schemas.openxmlformats.org/officeDocument/2006/relationships" xmlns:p="http://schemas.openxmlformats.org/presentationml/2006/main">
   <p:cSld>
     <p:spTree>
